--- a/public/fun/pack/pptx/newspro/카드뉴스프리미엄_26_알뜰생활팁_버건디샴페인.pptx
+++ b/public/fun/pack/pptx/newspro/카드뉴스프리미엄_26_알뜰생활팁_버건디샴페인.pptx
@@ -113,12 +113,12 @@
   <p:extLst>
     <p:ext uri="{521415D9-36F7-43E2-AB2F-B90AF26B5E84}">
       <p14:sectionLst xmlns:p14="http://schemas.microsoft.com/office/powerpoint/2010/main">
-        <p14:section name="시작" id="{CECDB1B7-8D21-4999-8EB6-E4F8C463E400}">
+        <p14:section name="시작" id="{30126CF0-0A98-414F-8857-233301E1C381}">
           <p14:sldIdLst>
             <p14:sldId id="256"/>
           </p14:sldIdLst>
         </p14:section>
-        <p14:section name="본문" id="{A8A427FE-D1B8-47CF-9A87-57DA943DA1BB}">
+        <p14:section name="본문" id="{1798DA55-C105-4EC4-AB05-A5A2BB661E7E}">
           <p14:sldIdLst>
             <p14:sldId id="257"/>
             <p14:sldId id="258"/>
@@ -127,7 +127,7 @@
             <p14:sldId id="261"/>
           </p14:sldIdLst>
         </p14:section>
-        <p14:section name="마무리" id="{8B3BAFFE-984A-4F05-A4C9-269B7710D4FE}">
+        <p14:section name="마무리" id="{6E2CBD52-367F-428E-A7DD-65AC549D34DF}">
           <p14:sldIdLst>
             <p14:sldId id="262"/>
           </p14:sldIdLst>
@@ -1648,7 +1648,7 @@
             </a:lvl1pPr>
           </a:lstStyle>
           <a:p>
-            <a:fld id="{FC2CBB7E-5C8E-4B1B-B2F4-4546B1108999}" type="slidenum">
+            <a:fld id="{C9599B57-9AC7-4446-8917-09E2D0D433EF}" type="slidenum">
               <a:rPr lang="en-US"/>
               <a:t>‹#›</a:t>
             </a:fld>
@@ -2456,7 +2456,7 @@
             </a:lvl1pPr>
           </a:lstStyle>
           <a:p>
-            <a:fld id="{BD80BA1A-4905-435A-9CA5-18187123F9F8}" type="slidenum">
+            <a:fld id="{53C7C2BB-C842-4B2F-B949-CB49D0BD2E3A}" type="slidenum">
               <a:rPr lang="en-US"/>
               <a:t>‹#›</a:t>
             </a:fld>
@@ -3140,7 +3140,7 @@
             </a:lvl1pPr>
           </a:lstStyle>
           <a:p>
-            <a:fld id="{8CE0475C-8E54-4A9F-A3E9-1AF0B2E44CB9}" type="slidenum">
+            <a:fld id="{4BF9B296-54CE-47C8-A864-EDA815339B67}" type="slidenum">
               <a:rPr lang="en-US"/>
               <a:t>‹#›</a:t>
             </a:fld>
@@ -4070,7 +4070,7 @@
           <a:bodyPr/>
           <a:lstStyle/>
           <a:p>
-            <a:fld id="{365481B4-3C8D-42A6-81D6-2476033B7438}" type="slidenum">
+            <a:fld id="{CEC4BBFB-4D2F-40C8-B636-F9E10A5F2F3F}" type="slidenum">
               <a:rPr lang="en-US"/>
               <a:t>‹#›</a:t>
             </a:fld>
@@ -4236,7 +4236,7 @@
           <a:bodyPr/>
           <a:lstStyle/>
           <a:p>
-            <a:fld id="{2E3D22D7-0B5E-4E1E-B3D3-616C27C3EC73}" type="slidenum">
+            <a:fld id="{1AC2B449-2E2D-48F9-BB76-BE3D51654371}" type="slidenum">
               <a:rPr lang="en-US"/>
               <a:t>‹#›</a:t>
             </a:fld>
@@ -4402,7 +4402,7 @@
           <a:bodyPr/>
           <a:lstStyle/>
           <a:p>
-            <a:fld id="{B64E3BAF-3687-4E03-B899-1F4496CF9D29}" type="slidenum">
+            <a:fld id="{F6EF5ECF-214D-4D60-BE13-130C6787DC36}" type="slidenum">
               <a:rPr lang="en-US"/>
               <a:t>‹#›</a:t>
             </a:fld>
@@ -4568,7 +4568,7 @@
           <a:bodyPr/>
           <a:lstStyle/>
           <a:p>
-            <a:fld id="{1FCDA9D9-747F-4A6B-A45B-0ABFF6C89C06}" type="slidenum">
+            <a:fld id="{F94ACDBD-E47B-44FF-8EAA-32A2CF6369BA}" type="slidenum">
               <a:rPr lang="en-US"/>
               <a:t>‹#›</a:t>
             </a:fld>
@@ -4734,7 +4734,7 @@
           <a:bodyPr/>
           <a:lstStyle/>
           <a:p>
-            <a:fld id="{1FFD812F-085C-4A34-A090-D805F63130A0}" type="slidenum">
+            <a:fld id="{8CEACEBF-5475-4E18-9CF0-F9F65031260F}" type="slidenum">
               <a:rPr lang="en-US"/>
               <a:t>‹#›</a:t>
             </a:fld>
